--- a/deliverables/PRESENTATION.pptx
+++ b/deliverables/PRESENTATION.pptx
@@ -6950,7 +6950,7 @@
               </a:defRPr>
             </a:pPr>
             <a:r>
-              <a:t>• Python: 16 cases, including migration, auditors, receipts and scoped history</a:t>
+              <a:t>• Python: 19 cases, including migration, auditors, receipts and scoped history</a:t>
             </a:r>
           </a:p>
         </p:txBody>
